--- a/pptx_outputs/CAMEL-AI_Presentation.pptx
+++ b/pptx_outputs/CAMEL-AI_Presentation.pptx
@@ -3129,7 +3129,7 @@
           <a:lstStyle/>
           <a:p>
             <a:r>
-              <a:t>Building Multi-Agent Systems for Task Automation</a:t>
+              <a:t>Exploring the Framework, Features, Community, and Applications</a:t>
             </a:r>
           </a:p>
         </p:txBody>
@@ -3173,33 +3173,14 @@
           </a:p>
         </p:txBody>
       </p:sp>
-      <p:pic>
-        <p:nvPicPr>
-          <p:cNvPr id="3" name="Picture Placeholder 2" descr="image.jpg"/>
-          <p:cNvPicPr>
-            <a:picLocks noGrp="1" noChangeAspect="1"/>
-          </p:cNvPicPr>
-          <p:nvPr>
-            <p:ph type="pic" idx="1"/>
-          </p:nvPr>
-        </p:nvPicPr>
-        <p:blipFill>
-          <a:blip r:embed="rId2"/>
-          <a:srcRect l="12482" r="12482"/>
-          <a:stretch>
-            <a:fillRect/>
-          </a:stretch>
-        </p:blipFill>
-        <p:spPr/>
-      </p:pic>
-      <p:sp>
-        <p:nvSpPr>
-          <p:cNvPr id="4" name="Text Placeholder 3"/>
-          <p:cNvSpPr>
-            <a:spLocks noGrp="1"/>
-          </p:cNvSpPr>
-          <p:nvPr>
-            <p:ph type="body" idx="2" sz="half"/>
+      <p:sp>
+        <p:nvSpPr>
+          <p:cNvPr id="3" name="Content Placeholder 2"/>
+          <p:cNvSpPr>
+            <a:spLocks noGrp="1"/>
+          </p:cNvSpPr>
+          <p:nvPr>
+            <p:ph idx="1"/>
           </p:nvPr>
         </p:nvSpPr>
         <p:spPr/>
@@ -3209,13 +3190,19 @@
           <a:p>
             <a:pPr/>
             <a:r>
-              <a:t>Open-source community for AI agent builders</a:t>
+              <a:t>Open-source community for multi-agent systems.</a:t>
             </a:r>
           </a:p>
           <a:p>
             <a:pPr/>
             <a:r>
-              <a:t>Focus on multi-agent systems for task automation, data generation, and world simulation</a:t>
+              <a:t>Focus on task automation, data generation, and world simulation.</a:t>
+            </a:r>
+          </a:p>
+          <a:p>
+            <a:pPr/>
+            <a:r>
+              <a:t>Similar to HuggingFace for AI agent builders.</a:t>
             </a:r>
           </a:p>
         </p:txBody>
@@ -3276,13 +3263,37 @@
           <a:p>
             <a:pPr/>
             <a:r>
-              <a:t>Tools and resources for developing AI agents</a:t>
+              <a:t>Eigent: Multi-agent workforce platform.</a:t>
             </a:r>
           </a:p>
           <a:p>
             <a:pPr/>
             <a:r>
-              <a:t>Emphasis on collaboration and knowledge sharing</a:t>
+              <a:t>OWL: Optimized Workforce Learning.</a:t>
+            </a:r>
+          </a:p>
+          <a:p>
+            <a:pPr/>
+            <a:r>
+              <a:t>OASIS: Social interaction simulations.</a:t>
+            </a:r>
+          </a:p>
+          <a:p>
+            <a:pPr/>
+            <a:r>
+              <a:t>CRAB: Cross-environment agent benchmark.</a:t>
+            </a:r>
+          </a:p>
+          <a:p>
+            <a:pPr/>
+            <a:r>
+              <a:t>LOONG: Synthesize long chains of thought.</a:t>
+            </a:r>
+          </a:p>
+          <a:p>
+            <a:pPr/>
+            <a:r>
+              <a:t>Agent Trust: Simulate human trust behavior.</a:t>
             </a:r>
           </a:p>
         </p:txBody>
@@ -3326,33 +3337,14 @@
           </a:p>
         </p:txBody>
       </p:sp>
-      <p:pic>
-        <p:nvPicPr>
-          <p:cNvPr id="3" name="Picture Placeholder 2" descr="image.jpg"/>
-          <p:cNvPicPr>
-            <a:picLocks noGrp="1" noChangeAspect="1"/>
-          </p:cNvPicPr>
-          <p:nvPr>
-            <p:ph type="pic" idx="1"/>
-          </p:nvPr>
-        </p:nvPicPr>
-        <p:blipFill>
-          <a:blip r:embed="rId2"/>
-          <a:srcRect t="25019" b="25019"/>
-          <a:stretch>
-            <a:fillRect/>
-          </a:stretch>
-        </p:blipFill>
-        <p:spPr/>
-      </p:pic>
-      <p:sp>
-        <p:nvSpPr>
-          <p:cNvPr id="4" name="Text Placeholder 3"/>
-          <p:cNvSpPr>
-            <a:spLocks noGrp="1"/>
-          </p:cNvSpPr>
-          <p:nvPr>
-            <p:ph type="body" idx="2" sz="half"/>
+      <p:sp>
+        <p:nvSpPr>
+          <p:cNvPr id="3" name="Content Placeholder 2"/>
+          <p:cNvSpPr>
+            <a:spLocks noGrp="1"/>
+          </p:cNvSpPr>
+          <p:nvPr>
+            <p:ph idx="1"/>
           </p:nvPr>
         </p:nvSpPr>
         <p:spPr/>
@@ -3362,13 +3354,25 @@
           <a:p>
             <a:pPr/>
             <a:r>
-              <a:t>Vibrant community on GitHub and Discord</a:t>
+              <a:t>HuggingFace-like community for AI agent builders.</a:t>
             </a:r>
           </a:p>
           <a:p>
             <a:pPr/>
             <a:r>
-              <a:t>Encourages contributions and discussions</a:t>
+              <a:t>Community Hub for engagement.</a:t>
+            </a:r>
+          </a:p>
+          <a:p>
+            <a:pPr/>
+            <a:r>
+              <a:t>Ambassador program.</a:t>
+            </a:r>
+          </a:p>
+          <a:p>
+            <a:pPr/>
+            <a:r>
+              <a:t>Career opportunities.</a:t>
             </a:r>
           </a:p>
         </p:txBody>
@@ -3412,33 +3416,14 @@
           </a:p>
         </p:txBody>
       </p:sp>
-      <p:pic>
-        <p:nvPicPr>
-          <p:cNvPr id="3" name="Picture Placeholder 2" descr="image.jpg"/>
-          <p:cNvPicPr>
-            <a:picLocks noGrp="1" noChangeAspect="1"/>
-          </p:cNvPicPr>
-          <p:nvPr>
-            <p:ph type="pic" idx="1"/>
-          </p:nvPr>
-        </p:nvPicPr>
-        <p:blipFill>
-          <a:blip r:embed="rId2"/>
-          <a:srcRect l="5532" r="5532"/>
-          <a:stretch>
-            <a:fillRect/>
-          </a:stretch>
-        </p:blipFill>
-        <p:spPr/>
-      </p:pic>
-      <p:sp>
-        <p:nvSpPr>
-          <p:cNvPr id="4" name="Text Placeholder 3"/>
-          <p:cNvSpPr>
-            <a:spLocks noGrp="1"/>
-          </p:cNvSpPr>
-          <p:nvPr>
-            <p:ph type="body" idx="2" sz="half"/>
+      <p:sp>
+        <p:nvSpPr>
+          <p:cNvPr id="3" name="Content Placeholder 2"/>
+          <p:cNvSpPr>
+            <a:spLocks noGrp="1"/>
+          </p:cNvSpPr>
+          <p:nvPr>
+            <p:ph idx="1"/>
           </p:nvPr>
         </p:nvSpPr>
         <p:spPr/>
@@ -3448,13 +3433,25 @@
           <a:p>
             <a:pPr/>
             <a:r>
-              <a:t>Designed for task automation and simulation</a:t>
+              <a:t>Task automation.</a:t>
             </a:r>
           </a:p>
           <a:p>
             <a:pPr/>
             <a:r>
-              <a:t>Versatile for different AI-driven projects</a:t>
+              <a:t>Data generation.</a:t>
+            </a:r>
+          </a:p>
+          <a:p>
+            <a:pPr/>
+            <a:r>
+              <a:t>World simulation.</a:t>
+            </a:r>
+          </a:p>
+          <a:p>
+            <a:pPr/>
+            <a:r>
+              <a:t>Development of AI agents for complex tasks.</a:t>
             </a:r>
           </a:p>
         </p:txBody>

--- a/pptx_outputs/CAMEL-AI_Presentation.pptx
+++ b/pptx_outputs/CAMEL-AI_Presentation.pptx
@@ -10,6 +10,7 @@
     <p:sldId id="258" r:id="rId9"/>
     <p:sldId id="259" r:id="rId10"/>
     <p:sldId id="260" r:id="rId11"/>
+    <p:sldId id="261" r:id="rId12"/>
   </p:sldIdLst>
   <p:sldSz cx="9144000" cy="6858000" type="screen4x3"/>
   <p:notesSz cx="6858000" cy="9144000"/>
@@ -3129,7 +3130,7 @@
           <a:lstStyle/>
           <a:p>
             <a:r>
-              <a:t>Exploring the Framework, Features, Community, and Applications</a:t>
+              <a:t>Purpose, Features, Community, and Impact</a:t>
             </a:r>
           </a:p>
         </p:txBody>
@@ -3168,7 +3169,7 @@
           <a:lstStyle/>
           <a:p>
             <a:r>
-              <a:t>Framework</a:t>
+              <a:t>Introduction</a:t>
             </a:r>
           </a:p>
         </p:txBody>
@@ -3190,19 +3191,25 @@
           <a:p>
             <a:pPr/>
             <a:r>
-              <a:t>Open-source community for multi-agent systems.</a:t>
+              <a:t>CAMEL-AI is a framework for multi-agent collaboration.</a:t>
             </a:r>
           </a:p>
           <a:p>
             <a:pPr/>
             <a:r>
-              <a:t>Focus on task automation, data generation, and world simulation.</a:t>
+              <a:t>Designed for real-world task automation across various domains.</a:t>
             </a:r>
           </a:p>
           <a:p>
             <a:pPr/>
             <a:r>
-              <a:t>Similar to HuggingFace for AI agent builders.</a:t>
+              <a:t>Connected to the OWL project (Optimized Workforce Learning).</a:t>
+            </a:r>
+          </a:p>
+          <a:p>
+            <a:pPr/>
+            <a:r>
+              <a:t>Aims to revolutionize AI agent collaboration to enable robust task automation.</a:t>
             </a:r>
           </a:p>
         </p:txBody>
@@ -3241,7 +3248,7 @@
           <a:lstStyle/>
           <a:p>
             <a:r>
-              <a:t>Features</a:t>
+              <a:t>Key Features</a:t>
             </a:r>
           </a:p>
         </p:txBody>
@@ -3263,37 +3270,25 @@
           <a:p>
             <a:pPr/>
             <a:r>
-              <a:t>Eigent: Multi-agent workforce platform.</a:t>
+              <a:t>Built on a multi-agent system architecture.</a:t>
             </a:r>
           </a:p>
           <a:p>
             <a:pPr/>
             <a:r>
-              <a:t>OWL: Optimized Workforce Learning.</a:t>
+              <a:t>Supports Actor Agents and Tools Pool for diverse capabilities.</a:t>
             </a:r>
           </a:p>
           <a:p>
             <a:pPr/>
             <a:r>
-              <a:t>OASIS: Social interaction simulations.</a:t>
+              <a:t>Enables scalable and efficient task automation.</a:t>
             </a:r>
           </a:p>
           <a:p>
             <a:pPr/>
             <a:r>
-              <a:t>CRAB: Cross-environment agent benchmark.</a:t>
-            </a:r>
-          </a:p>
-          <a:p>
-            <a:pPr/>
-            <a:r>
-              <a:t>LOONG: Synthesize long chains of thought.</a:t>
-            </a:r>
-          </a:p>
-          <a:p>
-            <a:pPr/>
-            <a:r>
-              <a:t>Agent Trust: Simulate human trust behavior.</a:t>
+              <a:t>Open-source with active development and benchmark achievements.</a:t>
             </a:r>
           </a:p>
         </p:txBody>
@@ -3332,7 +3327,7 @@
           <a:lstStyle/>
           <a:p>
             <a:r>
-              <a:t>Community</a:t>
+              <a:t>Applications</a:t>
             </a:r>
           </a:p>
         </p:txBody>
@@ -3354,25 +3349,25 @@
           <a:p>
             <a:pPr/>
             <a:r>
-              <a:t>HuggingFace-like community for AI agent builders.</a:t>
+              <a:t>Optimized Workforce Learning (OWL) framework built on CAMEL-AI.</a:t>
             </a:r>
           </a:p>
           <a:p>
             <a:pPr/>
             <a:r>
-              <a:t>Community Hub for engagement.</a:t>
+              <a:t>Real-world multi-agent task automation solutions.</a:t>
             </a:r>
           </a:p>
           <a:p>
             <a:pPr/>
             <a:r>
-              <a:t>Ambassador program.</a:t>
+              <a:t>Use in various domains requiring coordination among AI agents.</a:t>
             </a:r>
           </a:p>
           <a:p>
             <a:pPr/>
             <a:r>
-              <a:t>Career opportunities.</a:t>
+              <a:t>Benchmarking leadership in multi-agent task automation.</a:t>
             </a:r>
           </a:p>
         </p:txBody>
@@ -3411,7 +3406,7 @@
           <a:lstStyle/>
           <a:p>
             <a:r>
-              <a:t>Applications</a:t>
+              <a:t>Community</a:t>
             </a:r>
           </a:p>
         </p:txBody>
@@ -3433,25 +3428,104 @@
           <a:p>
             <a:pPr/>
             <a:r>
-              <a:t>Task automation.</a:t>
+              <a:t>Active open-source community on GitHub.</a:t>
             </a:r>
           </a:p>
           <a:p>
             <a:pPr/>
             <a:r>
-              <a:t>Data generation.</a:t>
+              <a:t>Contributions from developers worldwide.</a:t>
             </a:r>
           </a:p>
           <a:p>
             <a:pPr/>
             <a:r>
-              <a:t>World simulation.</a:t>
+              <a:t>Engagement through issues, pull requests, and discussions.</a:t>
             </a:r>
           </a:p>
           <a:p>
             <a:pPr/>
             <a:r>
-              <a:t>Development of AI agents for complex tasks.</a:t>
+              <a:t>Continuous updates and collaborative improvements.</a:t>
+            </a:r>
+          </a:p>
+        </p:txBody>
+      </p:sp>
+    </p:spTree>
+  </p:cSld>
+  <p:clrMapOvr>
+    <a:masterClrMapping/>
+  </p:clrMapOvr>
+</p:sld>
+</file>
+
+<file path=ppt/slides/slide6.xml><?xml version="1.0" encoding="utf-8"?>
+<p:sld xmlns:a="http://schemas.openxmlformats.org/drawingml/2006/main" xmlns:p="http://schemas.openxmlformats.org/presentationml/2006/main" xmlns:r="http://schemas.openxmlformats.org/officeDocument/2006/relationships">
+  <p:cSld>
+    <p:spTree>
+      <p:nvGrpSpPr>
+        <p:cNvPr id="1" name=""/>
+        <p:cNvGrpSpPr/>
+        <p:nvPr/>
+      </p:nvGrpSpPr>
+      <p:grpSpPr/>
+      <p:sp>
+        <p:nvSpPr>
+          <p:cNvPr id="2" name="Title 1"/>
+          <p:cNvSpPr>
+            <a:spLocks noGrp="1"/>
+          </p:cNvSpPr>
+          <p:nvPr>
+            <p:ph type="title"/>
+          </p:nvPr>
+        </p:nvSpPr>
+        <p:spPr/>
+        <p:txBody>
+          <a:bodyPr/>
+          <a:lstStyle/>
+          <a:p>
+            <a:r>
+              <a:t>Future Outlook</a:t>
+            </a:r>
+          </a:p>
+        </p:txBody>
+      </p:sp>
+      <p:sp>
+        <p:nvSpPr>
+          <p:cNvPr id="3" name="Content Placeholder 2"/>
+          <p:cNvSpPr>
+            <a:spLocks noGrp="1"/>
+          </p:cNvSpPr>
+          <p:nvPr>
+            <p:ph idx="1"/>
+          </p:nvPr>
+        </p:nvSpPr>
+        <p:spPr/>
+        <p:txBody>
+          <a:bodyPr/>
+          <a:lstStyle/>
+          <a:p>
+            <a:pPr/>
+            <a:r>
+              <a:t>Further advancements in multi-agent collaboration techniques.</a:t>
+            </a:r>
+          </a:p>
+          <a:p>
+            <a:pPr/>
+            <a:r>
+              <a:t>Expansion of real-world applications and integrations.</a:t>
+            </a:r>
+          </a:p>
+          <a:p>
+            <a:pPr/>
+            <a:r>
+              <a:t>Enhancement in AI task automation robustness and scalability.</a:t>
+            </a:r>
+          </a:p>
+          <a:p>
+            <a:pPr/>
+            <a:r>
+              <a:t>Growing community and ecosystem support.</a:t>
             </a:r>
           </a:p>
         </p:txBody>

--- a/pptx_outputs/CAMEL-AI_Presentation.pptx
+++ b/pptx_outputs/CAMEL-AI_Presentation.pptx
@@ -10,7 +10,6 @@
     <p:sldId id="258" r:id="rId9"/>
     <p:sldId id="259" r:id="rId10"/>
     <p:sldId id="260" r:id="rId11"/>
-    <p:sldId id="261" r:id="rId12"/>
   </p:sldIdLst>
   <p:sldSz cx="9144000" cy="6858000" type="screen4x3"/>
   <p:notesSz cx="6858000" cy="9144000"/>
@@ -3130,7 +3129,7 @@
           <a:lstStyle/>
           <a:p>
             <a:r>
-              <a:t>Purpose, Features, Community, and Impact</a:t>
+              <a:t>A Comprehensive Look at Features, Applications, and Community</a:t>
             </a:r>
           </a:p>
         </p:txBody>
@@ -3169,7 +3168,7 @@
           <a:lstStyle/>
           <a:p>
             <a:r>
-              <a:t>Introduction</a:t>
+              <a:t>Features of CAMEL-AI</a:t>
             </a:r>
           </a:p>
         </p:txBody>
@@ -3191,25 +3190,19 @@
           <a:p>
             <a:pPr/>
             <a:r>
-              <a:t>CAMEL-AI is a framework for multi-agent collaboration.</a:t>
+              <a:t>Open-source community for multi-agent systems</a:t>
             </a:r>
           </a:p>
           <a:p>
             <a:pPr/>
             <a:r>
-              <a:t>Designed for real-world task automation across various domains.</a:t>
+              <a:t>Focus on task automation, data generation, and world simulation</a:t>
             </a:r>
           </a:p>
           <a:p>
             <a:pPr/>
             <a:r>
-              <a:t>Connected to the OWL project (Optimized Workforce Learning).</a:t>
-            </a:r>
-          </a:p>
-          <a:p>
-            <a:pPr/>
-            <a:r>
-              <a:t>Aims to revolutionize AI agent collaboration to enable robust task automation.</a:t>
+              <a:t>Aims to find the scaling laws of agents</a:t>
             </a:r>
           </a:p>
         </p:txBody>
@@ -3248,19 +3241,38 @@
           <a:lstStyle/>
           <a:p>
             <a:r>
-              <a:t>Key Features</a:t>
-            </a:r>
-          </a:p>
-        </p:txBody>
-      </p:sp>
-      <p:sp>
-        <p:nvSpPr>
-          <p:cNvPr id="3" name="Content Placeholder 2"/>
-          <p:cNvSpPr>
-            <a:spLocks noGrp="1"/>
-          </p:cNvSpPr>
-          <p:nvPr>
-            <p:ph idx="1"/>
+              <a:t>Applications of CAMEL-AI</a:t>
+            </a:r>
+          </a:p>
+        </p:txBody>
+      </p:sp>
+      <p:pic>
+        <p:nvPicPr>
+          <p:cNvPr id="3" name="Picture Placeholder 2" descr="image.jpg"/>
+          <p:cNvPicPr>
+            <a:picLocks noGrp="1" noChangeAspect="1"/>
+          </p:cNvPicPr>
+          <p:nvPr>
+            <p:ph type="pic" idx="1"/>
+          </p:nvPr>
+        </p:nvPicPr>
+        <p:blipFill>
+          <a:blip r:embed="rId2"/>
+          <a:srcRect l="5532" r="5532"/>
+          <a:stretch>
+            <a:fillRect/>
+          </a:stretch>
+        </p:blipFill>
+        <p:spPr/>
+      </p:pic>
+      <p:sp>
+        <p:nvSpPr>
+          <p:cNvPr id="4" name="Text Placeholder 3"/>
+          <p:cNvSpPr>
+            <a:spLocks noGrp="1"/>
+          </p:cNvSpPr>
+          <p:nvPr>
+            <p:ph type="body" idx="2" sz="half"/>
           </p:nvPr>
         </p:nvSpPr>
         <p:spPr/>
@@ -3270,25 +3282,19 @@
           <a:p>
             <a:pPr/>
             <a:r>
-              <a:t>Built on a multi-agent system architecture.</a:t>
+              <a:t>Development of AI agents and multi-agent systems</a:t>
             </a:r>
           </a:p>
           <a:p>
             <a:pPr/>
             <a:r>
-              <a:t>Supports Actor Agents and Tools Pool for diverse capabilities.</a:t>
+              <a:t>Applications in natural language processing</a:t>
             </a:r>
           </a:p>
           <a:p>
             <a:pPr/>
             <a:r>
-              <a:t>Enables scalable and efficient task automation.</a:t>
-            </a:r>
-          </a:p>
-          <a:p>
-            <a:pPr/>
-            <a:r>
-              <a:t>Open-source with active development and benchmark achievements.</a:t>
+              <a:t>Deep learning and cooperative AI</a:t>
             </a:r>
           </a:p>
         </p:txBody>
@@ -3327,7 +3333,7 @@
           <a:lstStyle/>
           <a:p>
             <a:r>
-              <a:t>Applications</a:t>
+              <a:t>Community and Resources</a:t>
             </a:r>
           </a:p>
         </p:txBody>
@@ -3349,25 +3355,19 @@
           <a:p>
             <a:pPr/>
             <a:r>
-              <a:t>Optimized Workforce Learning (OWL) framework built on CAMEL-AI.</a:t>
+              <a:t>Strong community presence on GitHub</a:t>
             </a:r>
           </a:p>
           <a:p>
             <a:pPr/>
             <a:r>
-              <a:t>Real-world multi-agent task automation solutions.</a:t>
+              <a:t>Collaboration and support through Discord server</a:t>
             </a:r>
           </a:p>
           <a:p>
             <a:pPr/>
             <a:r>
-              <a:t>Use in various domains requiring coordination among AI agents.</a:t>
-            </a:r>
-          </a:p>
-          <a:p>
-            <a:pPr/>
-            <a:r>
-              <a:t>Benchmarking leadership in multi-agent task automation.</a:t>
+              <a:t>Extensive documentation and resources available</a:t>
             </a:r>
           </a:p>
         </p:txBody>
@@ -3406,19 +3406,38 @@
           <a:lstStyle/>
           <a:p>
             <a:r>
-              <a:t>Community</a:t>
-            </a:r>
-          </a:p>
-        </p:txBody>
-      </p:sp>
-      <p:sp>
-        <p:nvSpPr>
-          <p:cNvPr id="3" name="Content Placeholder 2"/>
-          <p:cNvSpPr>
-            <a:spLocks noGrp="1"/>
-          </p:cNvSpPr>
-          <p:nvPr>
-            <p:ph idx="1"/>
+              <a:t>Impact of CAMEL-AI</a:t>
+            </a:r>
+          </a:p>
+        </p:txBody>
+      </p:sp>
+      <p:pic>
+        <p:nvPicPr>
+          <p:cNvPr id="3" name="Picture Placeholder 2" descr="image.jpg"/>
+          <p:cNvPicPr>
+            <a:picLocks noGrp="1" noChangeAspect="1"/>
+          </p:cNvPicPr>
+          <p:nvPr>
+            <p:ph type="pic" idx="1"/>
+          </p:nvPr>
+        </p:nvPicPr>
+        <p:blipFill>
+          <a:blip r:embed="rId2"/>
+          <a:srcRect l="12482" r="12482"/>
+          <a:stretch>
+            <a:fillRect/>
+          </a:stretch>
+        </p:blipFill>
+        <p:spPr/>
+      </p:pic>
+      <p:sp>
+        <p:nvSpPr>
+          <p:cNvPr id="4" name="Text Placeholder 3"/>
+          <p:cNvSpPr>
+            <a:spLocks noGrp="1"/>
+          </p:cNvSpPr>
+          <p:nvPr>
+            <p:ph type="body" idx="2" sz="half"/>
           </p:nvPr>
         </p:nvSpPr>
         <p:spPr/>
@@ -3428,104 +3447,19 @@
           <a:p>
             <a:pPr/>
             <a:r>
-              <a:t>Active open-source community on GitHub.</a:t>
+              <a:t>Contributions to multi-agent frameworks</a:t>
             </a:r>
           </a:p>
           <a:p>
             <a:pPr/>
             <a:r>
-              <a:t>Contributions from developers worldwide.</a:t>
+              <a:t>Advancements in AI societies</a:t>
             </a:r>
           </a:p>
           <a:p>
             <a:pPr/>
             <a:r>
-              <a:t>Engagement through issues, pull requests, and discussions.</a:t>
-            </a:r>
-          </a:p>
-          <a:p>
-            <a:pPr/>
-            <a:r>
-              <a:t>Continuous updates and collaborative improvements.</a:t>
-            </a:r>
-          </a:p>
-        </p:txBody>
-      </p:sp>
-    </p:spTree>
-  </p:cSld>
-  <p:clrMapOvr>
-    <a:masterClrMapping/>
-  </p:clrMapOvr>
-</p:sld>
-</file>
-
-<file path=ppt/slides/slide6.xml><?xml version="1.0" encoding="utf-8"?>
-<p:sld xmlns:a="http://schemas.openxmlformats.org/drawingml/2006/main" xmlns:p="http://schemas.openxmlformats.org/presentationml/2006/main" xmlns:r="http://schemas.openxmlformats.org/officeDocument/2006/relationships">
-  <p:cSld>
-    <p:spTree>
-      <p:nvGrpSpPr>
-        <p:cNvPr id="1" name=""/>
-        <p:cNvGrpSpPr/>
-        <p:nvPr/>
-      </p:nvGrpSpPr>
-      <p:grpSpPr/>
-      <p:sp>
-        <p:nvSpPr>
-          <p:cNvPr id="2" name="Title 1"/>
-          <p:cNvSpPr>
-            <a:spLocks noGrp="1"/>
-          </p:cNvSpPr>
-          <p:nvPr>
-            <p:ph type="title"/>
-          </p:nvPr>
-        </p:nvSpPr>
-        <p:spPr/>
-        <p:txBody>
-          <a:bodyPr/>
-          <a:lstStyle/>
-          <a:p>
-            <a:r>
-              <a:t>Future Outlook</a:t>
-            </a:r>
-          </a:p>
-        </p:txBody>
-      </p:sp>
-      <p:sp>
-        <p:nvSpPr>
-          <p:cNvPr id="3" name="Content Placeholder 2"/>
-          <p:cNvSpPr>
-            <a:spLocks noGrp="1"/>
-          </p:cNvSpPr>
-          <p:nvPr>
-            <p:ph idx="1"/>
-          </p:nvPr>
-        </p:nvSpPr>
-        <p:spPr/>
-        <p:txBody>
-          <a:bodyPr/>
-          <a:lstStyle/>
-          <a:p>
-            <a:pPr/>
-            <a:r>
-              <a:t>Further advancements in multi-agent collaboration techniques.</a:t>
-            </a:r>
-          </a:p>
-          <a:p>
-            <a:pPr/>
-            <a:r>
-              <a:t>Expansion of real-world applications and integrations.</a:t>
-            </a:r>
-          </a:p>
-          <a:p>
-            <a:pPr/>
-            <a:r>
-              <a:t>Enhancement in AI task automation robustness and scalability.</a:t>
-            </a:r>
-          </a:p>
-          <a:p>
-            <a:pPr/>
-            <a:r>
-              <a:t>Growing community and ecosystem support.</a:t>
+              <a:t>Recognition in the AI development community</a:t>
             </a:r>
           </a:p>
         </p:txBody>

--- a/pptx_outputs/CAMEL-AI_Presentation.pptx
+++ b/pptx_outputs/CAMEL-AI_Presentation.pptx
@@ -10,6 +10,7 @@
     <p:sldId id="258" r:id="rId9"/>
     <p:sldId id="259" r:id="rId10"/>
     <p:sldId id="260" r:id="rId11"/>
+    <p:sldId id="261" r:id="rId12"/>
   </p:sldIdLst>
   <p:sldSz cx="9144000" cy="6858000" type="screen4x3"/>
   <p:notesSz cx="6858000" cy="9144000"/>
@@ -3129,7 +3130,7 @@
           <a:lstStyle/>
           <a:p>
             <a:r>
-              <a:t>A Comprehensive Look at Features, Applications, and Community</a:t>
+              <a:t>An open-source community for AI and multi-agent systems</a:t>
             </a:r>
           </a:p>
         </p:txBody>
@@ -3168,7 +3169,7 @@
           <a:lstStyle/>
           <a:p>
             <a:r>
-              <a:t>Features of CAMEL-AI</a:t>
+              <a:t>Introduction to CAMEL-AI</a:t>
             </a:r>
           </a:p>
         </p:txBody>
@@ -3190,19 +3191,13 @@
           <a:p>
             <a:pPr/>
             <a:r>
-              <a:t>Open-source community for multi-agent systems</a:t>
+              <a:t>Open-source community focused on scaling laws of agents</a:t>
             </a:r>
           </a:p>
           <a:p>
             <a:pPr/>
             <a:r>
-              <a:t>Focus on task automation, data generation, and world simulation</a:t>
-            </a:r>
-          </a:p>
-          <a:p>
-            <a:pPr/>
-            <a:r>
-              <a:t>Aims to find the scaling laws of agents</a:t>
+              <a:t>Supports data generation, world simulation, and task automation</a:t>
             </a:r>
           </a:p>
         </p:txBody>
@@ -3241,38 +3236,19 @@
           <a:lstStyle/>
           <a:p>
             <a:r>
-              <a:t>Applications of CAMEL-AI</a:t>
-            </a:r>
-          </a:p>
-        </p:txBody>
-      </p:sp>
-      <p:pic>
-        <p:nvPicPr>
-          <p:cNvPr id="3" name="Picture Placeholder 2" descr="image.jpg"/>
-          <p:cNvPicPr>
-            <a:picLocks noGrp="1" noChangeAspect="1"/>
-          </p:cNvPicPr>
-          <p:nvPr>
-            <p:ph type="pic" idx="1"/>
-          </p:nvPr>
-        </p:nvPicPr>
-        <p:blipFill>
-          <a:blip r:embed="rId2"/>
-          <a:srcRect l="5532" r="5532"/>
-          <a:stretch>
-            <a:fillRect/>
-          </a:stretch>
-        </p:blipFill>
-        <p:spPr/>
-      </p:pic>
-      <p:sp>
-        <p:nvSpPr>
-          <p:cNvPr id="4" name="Text Placeholder 3"/>
-          <p:cNvSpPr>
-            <a:spLocks noGrp="1"/>
-          </p:cNvSpPr>
-          <p:nvPr>
-            <p:ph type="body" idx="2" sz="half"/>
+              <a:t>GitHub Repository</a:t>
+            </a:r>
+          </a:p>
+        </p:txBody>
+      </p:sp>
+      <p:sp>
+        <p:nvSpPr>
+          <p:cNvPr id="3" name="Content Placeholder 2"/>
+          <p:cNvSpPr>
+            <a:spLocks noGrp="1"/>
+          </p:cNvSpPr>
+          <p:nvPr>
+            <p:ph idx="1"/>
           </p:nvPr>
         </p:nvSpPr>
         <p:spPr/>
@@ -3282,19 +3258,13 @@
           <a:p>
             <a:pPr/>
             <a:r>
-              <a:t>Development of AI agents and multi-agent systems</a:t>
+              <a:t>Title: 🐫 CAMEL: The first and the best multi-agent framework</a:t>
             </a:r>
           </a:p>
           <a:p>
             <a:pPr/>
             <a:r>
-              <a:t>Applications in natural language processing</a:t>
-            </a:r>
-          </a:p>
-          <a:p>
-            <a:pPr/>
-            <a:r>
-              <a:t>Deep learning and cooperative AI</a:t>
+              <a:t>Active development with multiple branches and commits</a:t>
             </a:r>
           </a:p>
         </p:txBody>
@@ -3333,7 +3303,7 @@
           <a:lstStyle/>
           <a:p>
             <a:r>
-              <a:t>Community and Resources</a:t>
+              <a:t>Key Features</a:t>
             </a:r>
           </a:p>
         </p:txBody>
@@ -3355,19 +3325,13 @@
           <a:p>
             <a:pPr/>
             <a:r>
-              <a:t>Strong community presence on GitHub</a:t>
+              <a:t>Supports natural language processing, deep learning, and AI</a:t>
             </a:r>
           </a:p>
           <a:p>
             <a:pPr/>
             <a:r>
-              <a:t>Collaboration and support through Discord server</a:t>
-            </a:r>
-          </a:p>
-          <a:p>
-            <a:pPr/>
-            <a:r>
-              <a:t>Extensive documentation and resources available</a:t>
+              <a:t>Facilitates study of AI societies, cooperative and communicative AI</a:t>
             </a:r>
           </a:p>
         </p:txBody>
@@ -3406,38 +3370,19 @@
           <a:lstStyle/>
           <a:p>
             <a:r>
-              <a:t>Impact of CAMEL-AI</a:t>
-            </a:r>
-          </a:p>
-        </p:txBody>
-      </p:sp>
-      <p:pic>
-        <p:nvPicPr>
-          <p:cNvPr id="3" name="Picture Placeholder 2" descr="image.jpg"/>
-          <p:cNvPicPr>
-            <a:picLocks noGrp="1" noChangeAspect="1"/>
-          </p:cNvPicPr>
-          <p:nvPr>
-            <p:ph type="pic" idx="1"/>
-          </p:nvPr>
-        </p:nvPicPr>
-        <p:blipFill>
-          <a:blip r:embed="rId2"/>
-          <a:srcRect l="12482" r="12482"/>
-          <a:stretch>
-            <a:fillRect/>
-          </a:stretch>
-        </p:blipFill>
-        <p:spPr/>
-      </p:pic>
-      <p:sp>
-        <p:nvSpPr>
-          <p:cNvPr id="4" name="Text Placeholder 3"/>
-          <p:cNvSpPr>
-            <a:spLocks noGrp="1"/>
-          </p:cNvSpPr>
-          <p:nvPr>
-            <p:ph type="body" idx="2" sz="half"/>
+              <a:t>Resources and Documentation</a:t>
+            </a:r>
+          </a:p>
+        </p:txBody>
+      </p:sp>
+      <p:sp>
+        <p:nvSpPr>
+          <p:cNvPr id="3" name="Content Placeholder 2"/>
+          <p:cNvSpPr>
+            <a:spLocks noGrp="1"/>
+          </p:cNvSpPr>
+          <p:nvPr>
+            <p:ph idx="1"/>
           </p:nvPr>
         </p:nvSpPr>
         <p:spPr/>
@@ -3447,19 +3392,80 @@
           <a:p>
             <a:pPr/>
             <a:r>
-              <a:t>Contributions to multi-agent frameworks</a:t>
+              <a:t>Official website: camel-ai.org</a:t>
             </a:r>
           </a:p>
           <a:p>
             <a:pPr/>
             <a:r>
-              <a:t>Advancements in AI societies</a:t>
-            </a:r>
-          </a:p>
+              <a:t>Documentation: docs.camel-ai.org</a:t>
+            </a:r>
+          </a:p>
+        </p:txBody>
+      </p:sp>
+    </p:spTree>
+  </p:cSld>
+  <p:clrMapOvr>
+    <a:masterClrMapping/>
+  </p:clrMapOvr>
+</p:sld>
+</file>
+
+<file path=ppt/slides/slide6.xml><?xml version="1.0" encoding="utf-8"?>
+<p:sld xmlns:a="http://schemas.openxmlformats.org/drawingml/2006/main" xmlns:p="http://schemas.openxmlformats.org/presentationml/2006/main" xmlns:r="http://schemas.openxmlformats.org/officeDocument/2006/relationships">
+  <p:cSld>
+    <p:spTree>
+      <p:nvGrpSpPr>
+        <p:cNvPr id="1" name=""/>
+        <p:cNvGrpSpPr/>
+        <p:nvPr/>
+      </p:nvGrpSpPr>
+      <p:grpSpPr/>
+      <p:sp>
+        <p:nvSpPr>
+          <p:cNvPr id="2" name="Title 1"/>
+          <p:cNvSpPr>
+            <a:spLocks noGrp="1"/>
+          </p:cNvSpPr>
+          <p:nvPr>
+            <p:ph type="title"/>
+          </p:nvPr>
+        </p:nvSpPr>
+        <p:spPr/>
+        <p:txBody>
+          <a:bodyPr/>
+          <a:lstStyle/>
+          <a:p>
+            <a:r>
+              <a:t>Community and Contributions</a:t>
+            </a:r>
+          </a:p>
+        </p:txBody>
+      </p:sp>
+      <p:sp>
+        <p:nvSpPr>
+          <p:cNvPr id="3" name="Content Placeholder 2"/>
+          <p:cNvSpPr>
+            <a:spLocks noGrp="1"/>
+          </p:cNvSpPr>
+          <p:nvPr>
+            <p:ph idx="1"/>
+          </p:nvPr>
+        </p:nvSpPr>
+        <p:spPr/>
+        <p:txBody>
+          <a:bodyPr/>
+          <a:lstStyle/>
           <a:p>
             <a:pPr/>
             <a:r>
-              <a:t>Recognition in the AI development community</a:t>
+              <a:t>Encourages community involvement and contributions</a:t>
+            </a:r>
+          </a:p>
+          <a:p>
+            <a:pPr/>
+            <a:r>
+              <a:t>Licensed under Apache-2.0</a:t>
             </a:r>
           </a:p>
         </p:txBody>
